--- a/Docs/2026_09_21/Baltimore_Vital_Signs_Presentation_1.pptx
+++ b/Docs/2026_09_21/Baltimore_Vital_Signs_Presentation_1.pptx
@@ -2295,7 +2295,7 @@
                 <a:ea typeface="Calibri" pitchFamily="34" charset="-122"/>
                 <a:cs typeface="Calibri" pitchFamily="34" charset="-120"/>
               </a:rPr>
-              <a:t>Prepared for the Board · The Lily Foundation &amp; Advocates</a:t>
+              <a:t>BNIA Vital Signs 2010–2023</a:t>
             </a:r>
             <a:endParaRPr lang="en-US" sz="1100" dirty="0"/>
           </a:p>
